--- a/docs/slides/lesson-09.pptx
+++ b/docs/slides/lesson-09.pptx
@@ -3778,7 +3778,7 @@
                 <a:ea typeface="Calibri" pitchFamily="34" charset="-122"/>
                 <a:cs typeface="Calibri" pitchFamily="34" charset="-120"/>
               </a:rPr>
-              <a:t>思考力とAI実践を統合し、成果物を完成させる最終回です。</a:t>
+              <a:t>思考力とAI実践の統合として、簡単な自動化・ミニ制作を自分の手で動かす回です。</a:t>
             </a:r>
             <a:endParaRPr lang="en-US" sz="1350" dirty="0"/>
           </a:p>
